--- a/Lesson19-CoordinatorPro/Lesson19-CoordinatorPro.pptx
+++ b/Lesson19-CoordinatorPro/Lesson19-CoordinatorPro.pptx
@@ -775,7 +775,7 @@
           <a:p>
             <a:r>
               <a:rPr lang="en-US" dirty="0"/>
-              <a:t>Setup adds one twist. The packages are the usual Microsoft.SemanticKernel and Connectors.OpenAI at version 1.78.0 on .NET 10, the key comes from OPENAI_API_KEY, and every agent uses gpt-4.1-mini. The comment in the code notes that you could swap in a higher-tier OpenAI model for the Coordinator's routing reasoning, but the lesson ships with gpt-4.1-mini throughout. The twist, highlighted, is the HttpClient: we create one wrapped in a RetryHandler with up to five retries, and pass it to AddOpenAIChatCompletion through its httpClient parameter. The project has two source files: Program.cs for the orchestration, and RetryHandler.cs for resilience.</a:t>
+              <a:t>Setup adds one twist. The packages are the usual Microsoft.SemanticKernel and Connectors.OpenAI at version 1.78.0 on .NET 10, the key comes from OPENAI_API_KEY, and every agent uses gpt-4.1-mini. The comment in the code notes that you could swap in a higher-tier OpenAI model for the Coordinator's routing reasoning, but the lesson ships with gpt-4.1-mini throughout. The twist, highlighted, is the HttpClient: we create one wrapped in a RetryHandler with up to five retries, and pass it to AddOpenAIChatCompletion through its httpClient parameter. The project has three source files: Program.cs for the orchestration, RoutingDecision.cs for the Coordinator's typed JSON decision, and RetryHandler.cs for resilience.</a:t>
             </a:r>
             <a:endParaRPr lang="en-US" dirty="0"/>
           </a:p>
@@ -4888,7 +4888,7 @@
                 <a:ea typeface="Calibri" pitchFamily="34" charset="-122"/>
                 <a:cs typeface="Calibri" pitchFamily="34" charset="-120"/>
               </a:rPr>
-              <a:t>Two files: Program.cs for orchestration, RetryHandler.cs for resilience.</a:t>
+              <a:t>Program.cs orchestrates, RoutingDecision.cs types it, RetryHandler.cs retries.</a:t>
             </a:r>
             <a:endParaRPr lang="en-US" sz="1400" dirty="0"/>
           </a:p>
